--- a/system-design-101/vi/lessons/sd-06-009/slides/sd-06-009.pptx
+++ b/system-design-101/vi/lessons/sd-06-009/slides/sd-06-009.pptx
@@ -3995,6 +3995,39 @@
               <a:buNone/>
             </a:pPr>
             <a:r>
+              <a:rPr lang="en-US" sz="2700" dirty="0" spc="0" kern="0">
+                <a:solidFill>
+                  <a:srgbClr val="E4E1D8"/>
+                </a:solidFill>
+                <a:latin typeface="Be Vietnam Pro" pitchFamily="34" charset="0"/>
+                <a:ea typeface="Be Vietnam Pro" pitchFamily="34" charset="-122"/>
+                <a:cs typeface="Be Vietnam Pro" pitchFamily="34" charset="-120"/>
+              </a:rPr>
+              <a:t>Đổi</a:t>
+            </a:r>
+            <a:r>
+              <a:rPr lang="en-US" sz="2700" dirty="0" spc="-2" kern="0">
+                <a:solidFill>
+                  <a:srgbClr val="E4E1D8"/>
+                </a:solidFill>
+                <a:latin typeface="Be Vietnam Pro" pitchFamily="34" charset="0"/>
+                <a:ea typeface="Be Vietnam Pro" pitchFamily="34" charset="-122"/>
+                <a:cs typeface="Be Vietnam Pro" pitchFamily="34" charset="-120"/>
+              </a:rPr>
+              <a:t> liên</a:t>
+            </a:r>
+            <a:r>
+              <a:rPr lang="en-US" sz="2700" dirty="0" spc="0" kern="0">
+                <a:solidFill>
+                  <a:srgbClr val="E4E1D8"/>
+                </a:solidFill>
+                <a:latin typeface="Be Vietnam Pro" pitchFamily="34" charset="0"/>
+                <a:ea typeface="Be Vietnam Pro" pitchFamily="34" charset="-122"/>
+                <a:cs typeface="Be Vietnam Pro" pitchFamily="34" charset="-120"/>
+              </a:rPr>
+              <a:t> tục</a:t>
+            </a:r>
+            <a:r>
               <a:rPr lang="en-US" sz="2700" dirty="0" spc="-1" kern="0">
                 <a:solidFill>
                   <a:srgbClr val="E4E1D8"/>
@@ -4003,18 +4036,29 @@
                 <a:ea typeface="Be Vietnam Pro" pitchFamily="34" charset="-122"/>
                 <a:cs typeface="Be Vietnam Pro" pitchFamily="34" charset="-120"/>
               </a:rPr>
-              <a:t>Dữ liệu</a:t>
-            </a:r>
-            <a:r>
-              <a:rPr lang="en-US" sz="2700" dirty="0" spc="12" kern="0">
-                <a:solidFill>
-                  <a:srgbClr val="E4E1D8"/>
-                </a:solidFill>
-                <a:latin typeface="Be Vietnam Pro" pitchFamily="34" charset="0"/>
-                <a:ea typeface="Be Vietnam Pro" pitchFamily="34" charset="-122"/>
-                <a:cs typeface="Be Vietnam Pro" pitchFamily="34" charset="-120"/>
-              </a:rPr>
-              <a:t> đổi</a:t>
+              <a:t> thì</a:t>
+            </a:r>
+            <a:r>
+              <a:rPr lang="en-US" sz="2700" dirty="0" spc="-5" kern="0">
+                <a:solidFill>
+                  <a:srgbClr val="E4E1D8"/>
+                </a:solidFill>
+                <a:latin typeface="Be Vietnam Pro" pitchFamily="34" charset="0"/>
+                <a:ea typeface="Be Vietnam Pro" pitchFamily="34" charset="-122"/>
+                <a:cs typeface="Be Vietnam Pro" pitchFamily="34" charset="-120"/>
+              </a:rPr>
+              <a:t> bản</a:t>
+            </a:r>
+            <a:r>
+              <a:rPr lang="en-US" sz="2700" dirty="0" spc="11" kern="0">
+                <a:solidFill>
+                  <a:srgbClr val="E4E1D8"/>
+                </a:solidFill>
+                <a:latin typeface="Be Vietnam Pro" pitchFamily="34" charset="0"/>
+                <a:ea typeface="Be Vietnam Pro" pitchFamily="34" charset="-122"/>
+                <a:cs typeface="Be Vietnam Pro" pitchFamily="34" charset="-120"/>
+              </a:rPr>
+              <a:t> đệm</a:t>
             </a:r>
             <a:r>
               <a:rPr lang="en-US" sz="2700" dirty="0" spc="-2" kern="0">
@@ -4025,106 +4069,7 @@
                 <a:ea typeface="Be Vietnam Pro" pitchFamily="34" charset="-122"/>
                 <a:cs typeface="Be Vietnam Pro" pitchFamily="34" charset="-120"/>
               </a:rPr>
-              <a:t> liên</a:t>
-            </a:r>
-            <a:r>
-              <a:rPr lang="en-US" sz="2700" dirty="0" spc="0" kern="0">
-                <a:solidFill>
-                  <a:srgbClr val="E4E1D8"/>
-                </a:solidFill>
-                <a:latin typeface="Be Vietnam Pro" pitchFamily="34" charset="0"/>
-                <a:ea typeface="Be Vietnam Pro" pitchFamily="34" charset="-122"/>
-                <a:cs typeface="Be Vietnam Pro" pitchFamily="34" charset="-120"/>
-              </a:rPr>
-              <a:t> tục:</a:t>
-            </a:r>
-            <a:r>
-              <a:rPr lang="en-US" sz="2700" dirty="0" spc="-6" kern="0">
-                <a:solidFill>
-                  <a:srgbClr val="E4E1D8"/>
-                </a:solidFill>
-                <a:latin typeface="Be Vietnam Pro" pitchFamily="34" charset="0"/>
-                <a:ea typeface="Be Vietnam Pro" pitchFamily="34" charset="-122"/>
-                <a:cs typeface="Be Vietnam Pro" pitchFamily="34" charset="-120"/>
-              </a:rPr>
-              <a:t> bản</a:t>
-            </a:r>
-            <a:r>
-              <a:rPr lang="en-US" sz="2700" dirty="0" spc="11" kern="0">
-                <a:solidFill>
-                  <a:srgbClr val="E4E1D8"/>
-                </a:solidFill>
-                <a:latin typeface="Be Vietnam Pro" pitchFamily="34" charset="0"/>
-                <a:ea typeface="Be Vietnam Pro" pitchFamily="34" charset="-122"/>
-                <a:cs typeface="Be Vietnam Pro" pitchFamily="34" charset="-120"/>
-              </a:rPr>
-              <a:t> đệm</a:t>
-            </a:r>
-            <a:r>
-              <a:rPr lang="en-US" sz="2700" dirty="0" spc="-1" kern="0">
-                <a:solidFill>
-                  <a:srgbClr val="E4E1D8"/>
-                </a:solidFill>
-                <a:latin typeface="Be Vietnam Pro" pitchFamily="34" charset="0"/>
-                <a:ea typeface="Be Vietnam Pro" pitchFamily="34" charset="-122"/>
-                <a:cs typeface="Be Vietnam Pro" pitchFamily="34" charset="-120"/>
-              </a:rPr>
-              <a:t> cũ nhanh,</a:t>
-            </a:r>
-            <a:r>
-              <a:rPr lang="en-US" sz="2700" dirty="0" spc="-3" kern="0">
-                <a:solidFill>
-                  <a:srgbClr val="E4E1D8"/>
-                </a:solidFill>
-                <a:latin typeface="Be Vietnam Pro" pitchFamily="34" charset="0"/>
-                <a:ea typeface="Be Vietnam Pro" pitchFamily="34" charset="-122"/>
-                <a:cs typeface="Be Vietnam Pro" pitchFamily="34" charset="-120"/>
-              </a:rPr>
-              <a:t> giữ</a:t>
-            </a:r>
-            <a:r>
-              <a:rPr lang="en-US" sz="2700" dirty="0" spc="-2" kern="0">
-                <a:solidFill>
-                  <a:srgbClr val="E4E1D8"/>
-                </a:solidFill>
-                <a:latin typeface="Be Vietnam Pro" pitchFamily="34" charset="0"/>
-                <a:ea typeface="Be Vietnam Pro" pitchFamily="34" charset="-122"/>
-                <a:cs typeface="Be Vietnam Pro" pitchFamily="34" charset="-120"/>
-              </a:rPr>
-              <a:t> khớp</a:t>
-            </a:r>
-            <a:r>
-              <a:rPr lang="en-US" sz="2700" dirty="0" spc="-3" kern="0">
-                <a:solidFill>
-                  <a:srgbClr val="E4E1D8"/>
-                </a:solidFill>
-                <a:latin typeface="Be Vietnam Pro" pitchFamily="34" charset="0"/>
-                <a:ea typeface="Be Vietnam Pro" pitchFamily="34" charset="-122"/>
-                <a:cs typeface="Be Vietnam Pro" pitchFamily="34" charset="-120"/>
-              </a:rPr>
-              <a:t> ăn</a:t>
-            </a:r>
-            <a:r>
-              <a:rPr lang="en-US" sz="2700" dirty="0" spc="-8" kern="0">
-                <a:solidFill>
-                  <a:srgbClr val="E4E1D8"/>
-                </a:solidFill>
-                <a:latin typeface="Be Vietnam Pro" pitchFamily="34" charset="0"/>
-                <a:ea typeface="Be Vietnam Pro" pitchFamily="34" charset="-122"/>
-                <a:cs typeface="Be Vietnam Pro" pitchFamily="34" charset="-120"/>
-              </a:rPr>
-              <a:t> hết</a:t>
-            </a:r>
-            <a:r>
-              <a:rPr lang="en-US" sz="2700" dirty="0" spc="-1" kern="0">
-                <a:solidFill>
-                  <a:srgbClr val="E4E1D8"/>
-                </a:solidFill>
-                <a:latin typeface="Be Vietnam Pro" pitchFamily="34" charset="0"/>
-                <a:ea typeface="Be Vietnam Pro" pitchFamily="34" charset="-122"/>
-                <a:cs typeface="Be Vietnam Pro" pitchFamily="34" charset="-120"/>
-              </a:rPr>
-              <a:t> lợi ích</a:t>
+              <a:t> cũ nhanh</a:t>
             </a:r>
             <a:endParaRPr lang="en-US" sz="2700" dirty="0"/>
           </a:p>
@@ -4274,40 +4219,18 @@
               <a:t> biến</a:t>
             </a:r>
             <a:r>
-              <a:rPr lang="en-US" sz="2700" dirty="0" spc="-13" kern="0">
-                <a:solidFill>
-                  <a:srgbClr val="E4E1D8"/>
-                </a:solidFill>
-                <a:latin typeface="Be Vietnam Pro" pitchFamily="34" charset="0"/>
-                <a:ea typeface="Be Vietnam Pro" pitchFamily="34" charset="-122"/>
-                <a:cs typeface="Be Vietnam Pro" pitchFamily="34" charset="-120"/>
-              </a:rPr>
-              <a:t> mất</a:t>
-            </a:r>
-            <a:r>
-              <a:rPr lang="en-US" sz="2700" dirty="0" spc="-17" kern="0">
-                <a:solidFill>
-                  <a:srgbClr val="E4E1D8"/>
-                </a:solidFill>
-                <a:latin typeface="Be Vietnam Pro" pitchFamily="34" charset="0"/>
-                <a:ea typeface="Be Vietnam Pro" pitchFamily="34" charset="-122"/>
-                <a:cs typeface="Be Vietnam Pro" pitchFamily="34" charset="-120"/>
-              </a:rPr>
-              <a:t> bất</a:t>
-            </a:r>
-            <a:r>
-              <a:rPr lang="en-US" sz="2700" dirty="0" spc="-1" kern="0">
-                <a:solidFill>
-                  <a:srgbClr val="E4E1D8"/>
-                </a:solidFill>
-                <a:latin typeface="Be Vietnam Pro" pitchFamily="34" charset="0"/>
-                <a:ea typeface="Be Vietnam Pro" pitchFamily="34" charset="-122"/>
-                <a:cs typeface="Be Vietnam Pro" pitchFamily="34" charset="-120"/>
-              </a:rPr>
-              <a:t> cứ lúc nào;</a:t>
-            </a:r>
-            <a:r>
-              <a:rPr lang="en-US" sz="2700" dirty="0" spc="-3" kern="0">
+              <a:rPr lang="en-US" sz="2700" dirty="0" spc="-9" kern="0">
+                <a:solidFill>
+                  <a:srgbClr val="E4E1D8"/>
+                </a:solidFill>
+                <a:latin typeface="Be Vietnam Pro" pitchFamily="34" charset="0"/>
+                <a:ea typeface="Be Vietnam Pro" pitchFamily="34" charset="-122"/>
+                <a:cs typeface="Be Vietnam Pro" pitchFamily="34" charset="-120"/>
+              </a:rPr>
+              <a:t> mất;</a:t>
+            </a:r>
+            <a:r>
+              <a:rPr lang="en-US" sz="2700" dirty="0" spc="-4" kern="0">
                 <a:solidFill>
                   <a:srgbClr val="E4E1D8"/>
                 </a:solidFill>
@@ -10153,6 +10076,28 @@
               <a:t> 8</a:t>
             </a:r>
             <a:r>
+              <a:rPr lang="en-US" sz="2100" dirty="0" spc="0" kern="0">
+                <a:solidFill>
+                  <a:srgbClr val="6B6A66"/>
+                </a:solidFill>
+                <a:latin typeface="Be Vietnam Pro" pitchFamily="34" charset="0"/>
+                <a:ea typeface="Be Vietnam Pro" pitchFamily="34" charset="-122"/>
+                <a:cs typeface="Be Vietnam Pro" pitchFamily="34" charset="-120"/>
+              </a:rPr>
+              <a:t> lên</a:t>
+            </a:r>
+            <a:r>
+              <a:rPr lang="en-US" sz="2100" dirty="0" spc="-2" kern="0">
+                <a:solidFill>
+                  <a:srgbClr val="6B6A66"/>
+                </a:solidFill>
+                <a:latin typeface="Be Vietnam Pro" pitchFamily="34" charset="0"/>
+                <a:ea typeface="Be Vietnam Pro" pitchFamily="34" charset="-122"/>
+                <a:cs typeface="Be Vietnam Pro" pitchFamily="34" charset="-120"/>
+              </a:rPr>
+              <a:t> 16</a:t>
+            </a:r>
+            <a:r>
               <a:rPr lang="en-US" sz="2100" dirty="0" spc="1" kern="0">
                 <a:solidFill>
                   <a:srgbClr val="6B6A66"/>
@@ -10164,6 +10109,17 @@
               <a:t> MB</a:t>
             </a:r>
             <a:r>
+              <a:rPr lang="en-US" sz="2100" dirty="0" spc="-1" kern="0">
+                <a:solidFill>
+                  <a:srgbClr val="6B6A66"/>
+                </a:solidFill>
+                <a:latin typeface="Be Vietnam Pro" pitchFamily="34" charset="0"/>
+                <a:ea typeface="Be Vietnam Pro" pitchFamily="34" charset="-122"/>
+                <a:cs typeface="Be Vietnam Pro" pitchFamily="34" charset="-120"/>
+              </a:rPr>
+              <a:t> không</a:t>
+            </a:r>
+            <a:r>
               <a:rPr lang="en-US" sz="2100" dirty="0" spc="0" kern="0">
                 <a:solidFill>
                   <a:srgbClr val="6B6A66"/>
@@ -10172,128 +10128,7 @@
                 <a:ea typeface="Be Vietnam Pro" pitchFamily="34" charset="-122"/>
                 <a:cs typeface="Be Vietnam Pro" pitchFamily="34" charset="-120"/>
               </a:rPr>
-              <a:t> lên</a:t>
-            </a:r>
-            <a:r>
-              <a:rPr lang="en-US" sz="2100" dirty="0" spc="-2" kern="0">
-                <a:solidFill>
-                  <a:srgbClr val="6B6A66"/>
-                </a:solidFill>
-                <a:latin typeface="Be Vietnam Pro" pitchFamily="34" charset="0"/>
-                <a:ea typeface="Be Vietnam Pro" pitchFamily="34" charset="-122"/>
-                <a:cs typeface="Be Vietnam Pro" pitchFamily="34" charset="-120"/>
-              </a:rPr>
-              <a:t> 16</a:t>
-            </a:r>
-            <a:r>
-              <a:rPr lang="en-US" sz="2100" dirty="0" spc="1" kern="0">
-                <a:solidFill>
-                  <a:srgbClr val="6B6A66"/>
-                </a:solidFill>
-                <a:latin typeface="Be Vietnam Pro" pitchFamily="34" charset="0"/>
-                <a:ea typeface="Be Vietnam Pro" pitchFamily="34" charset="-122"/>
-                <a:cs typeface="Be Vietnam Pro" pitchFamily="34" charset="-120"/>
-              </a:rPr>
-              <a:t> MB</a:t>
-            </a:r>
-            <a:r>
-              <a:rPr lang="en-US" sz="2100" dirty="0" spc="-1" kern="0">
-                <a:solidFill>
-                  <a:srgbClr val="6B6A66"/>
-                </a:solidFill>
-                <a:latin typeface="Be Vietnam Pro" pitchFamily="34" charset="0"/>
-                <a:ea typeface="Be Vietnam Pro" pitchFamily="34" charset="-122"/>
-                <a:cs typeface="Be Vietnam Pro" pitchFamily="34" charset="-120"/>
-              </a:rPr>
-              <a:t> không</a:t>
-            </a:r>
-            <a:r>
-              <a:rPr lang="en-US" sz="2100" dirty="0" spc="0" kern="0">
-                <a:solidFill>
-                  <a:srgbClr val="6B6A66"/>
-                </a:solidFill>
-                <a:latin typeface="Be Vietnam Pro" pitchFamily="34" charset="0"/>
-                <a:ea typeface="Be Vietnam Pro" pitchFamily="34" charset="-122"/>
-                <a:cs typeface="Be Vietnam Pro" pitchFamily="34" charset="-120"/>
-              </a:rPr>
-              <a:t> trúng thêm.</a:t>
-            </a:r>
-            <a:r>
-              <a:rPr lang="en-US" sz="2100" dirty="0" spc="-30" kern="0">
-                <a:solidFill>
-                  <a:srgbClr val="6B6A66"/>
-                </a:solidFill>
-                <a:latin typeface="Be Vietnam Pro" pitchFamily="34" charset="0"/>
-                <a:ea typeface="Be Vietnam Pro" pitchFamily="34" charset="-122"/>
-                <a:cs typeface="Be Vietnam Pro" pitchFamily="34" charset="-120"/>
-              </a:rPr>
-              <a:t> Truy</a:t>
-            </a:r>
-            <a:r>
-              <a:rPr lang="en-US" sz="2100" dirty="0" spc="-4" kern="0">
-                <a:solidFill>
-                  <a:srgbClr val="6B6A66"/>
-                </a:solidFill>
-                <a:latin typeface="Be Vietnam Pro" pitchFamily="34" charset="0"/>
-                <a:ea typeface="Be Vietnam Pro" pitchFamily="34" charset="-122"/>
-                <a:cs typeface="Be Vietnam Pro" pitchFamily="34" charset="-120"/>
-              </a:rPr>
-              <a:t> cập</a:t>
-            </a:r>
-            <a:r>
-              <a:rPr lang="en-US" sz="2100" dirty="0" spc="9" kern="0">
-                <a:solidFill>
-                  <a:srgbClr val="6B6A66"/>
-                </a:solidFill>
-                <a:latin typeface="Be Vietnam Pro" pitchFamily="34" charset="0"/>
-                <a:ea typeface="Be Vietnam Pro" pitchFamily="34" charset="-122"/>
-                <a:cs typeface="Be Vietnam Pro" pitchFamily="34" charset="-120"/>
-              </a:rPr>
-              <a:t> đều:</a:t>
-            </a:r>
-            <a:r>
-              <a:rPr lang="en-US" sz="2100" dirty="0" spc="0" kern="0">
-                <a:solidFill>
-                  <a:srgbClr val="6B6A66"/>
-                </a:solidFill>
-                <a:latin typeface="Be Vietnam Pro" pitchFamily="34" charset="0"/>
-                <a:ea typeface="Be Vietnam Pro" pitchFamily="34" charset="-122"/>
-                <a:cs typeface="Be Vietnam Pro" pitchFamily="34" charset="-120"/>
-              </a:rPr>
-              <a:t> 4</a:t>
-            </a:r>
-            <a:r>
-              <a:rPr lang="en-US" sz="2100" dirty="0" spc="1" kern="0">
-                <a:solidFill>
-                  <a:srgbClr val="6B6A66"/>
-                </a:solidFill>
-                <a:latin typeface="Be Vietnam Pro" pitchFamily="34" charset="0"/>
-                <a:ea typeface="Be Vietnam Pro" pitchFamily="34" charset="-122"/>
-                <a:cs typeface="Be Vietnam Pro" pitchFamily="34" charset="-120"/>
-              </a:rPr>
-              <a:t> MB</a:t>
-            </a:r>
-            <a:r>
-              <a:rPr lang="en-US" sz="2100" dirty="0" spc="0" kern="0">
-                <a:solidFill>
-                  <a:srgbClr val="6B6A66"/>
-                </a:solidFill>
-                <a:latin typeface="Be Vietnam Pro" pitchFamily="34" charset="0"/>
-                <a:ea typeface="Be Vietnam Pro" pitchFamily="34" charset="-122"/>
-                <a:cs typeface="Be Vietnam Pro" pitchFamily="34" charset="-120"/>
-              </a:rPr>
-              <a:t> chỉ trúng</a:t>
-            </a:r>
-            <a:r>
-              <a:rPr lang="en-US" sz="2100" dirty="0" spc="-1" kern="0">
-                <a:solidFill>
-                  <a:srgbClr val="6B6A66"/>
-                </a:solidFill>
-                <a:latin typeface="Be Vietnam Pro" pitchFamily="34" charset="0"/>
-                <a:ea typeface="Be Vietnam Pro" pitchFamily="34" charset="-122"/>
-                <a:cs typeface="Be Vietnam Pro" pitchFamily="34" charset="-120"/>
-              </a:rPr>
-              <a:t> 29%.</a:t>
+              <a:t> trúng thêm</a:t>
             </a:r>
             <a:endParaRPr lang="en-US" sz="2100" dirty="0"/>
           </a:p>

--- a/system-design-101/vi/lessons/sd-06-009/slides/sd-06-009.pptx
+++ b/system-design-101/vi/lessons/sd-06-009/slides/sd-06-009.pptx
@@ -9099,7 +9099,7 @@
               <a:t>Xem</a:t>
             </a:r>
             <a:r>
-              <a:rPr lang="en-US" sz="3600" dirty="0" spc="-17" kern="0">
+              <a:rPr lang="en-US" sz="3600" dirty="0" spc="2" kern="0">
                 <a:solidFill>
                   <a:srgbClr val="3DD6A0"/>
                 </a:solidFill>
@@ -9107,10 +9107,10 @@
                 <a:ea typeface="Bricolage Grotesque ExtraBold" pitchFamily="34" charset="-122"/>
                 <a:cs typeface="Bricolage Grotesque ExtraBold" pitchFamily="34" charset="-120"/>
               </a:rPr>
-              <a:t> evicted_keys</a:t>
-            </a:r>
-            <a:r>
-              <a:rPr lang="en-US" sz="3600" dirty="0" spc="1" kern="0">
+              <a:t> chính sách</a:t>
+            </a:r>
+            <a:r>
+              <a:rPr lang="en-US" sz="3600" dirty="0" spc="-39" kern="0">
                 <a:solidFill>
                   <a:srgbClr val="3DD6A0"/>
                 </a:solidFill>
@@ -9118,18 +9118,7 @@
                 <a:ea typeface="Bricolage Grotesque ExtraBold" pitchFamily="34" charset="-122"/>
                 <a:cs typeface="Bricolage Grotesque ExtraBold" pitchFamily="34" charset="-120"/>
               </a:rPr>
-              <a:t> tăng bao</a:t>
-            </a:r>
-            <a:r>
-              <a:rPr lang="en-US" sz="3600" dirty="0" spc="3" kern="0">
-                <a:solidFill>
-                  <a:srgbClr val="3DD6A0"/>
-                </a:solidFill>
-                <a:latin typeface="Bricolage Grotesque ExtraBold" pitchFamily="34" charset="0"/>
-                <a:ea typeface="Bricolage Grotesque ExtraBold" pitchFamily="34" charset="-122"/>
-                <a:cs typeface="Bricolage Grotesque ExtraBold" pitchFamily="34" charset="-120"/>
-              </a:rPr>
-              <a:t> nhiêu</a:t>
+              <a:t> trước</a:t>
             </a:r>
             <a:endParaRPr lang="en-US" sz="3600" dirty="0"/>
           </a:p>
@@ -9168,15 +9157,70 @@
               <a:buChar char="•"/>
             </a:pPr>
             <a:r>
-              <a:rPr lang="en-US" sz="2700" dirty="0" spc="-60" kern="0">
-                <a:solidFill>
-                  <a:srgbClr val="E4E1D8"/>
-                </a:solidFill>
-                <a:latin typeface="Be Vietnam Pro" pitchFamily="34" charset="0"/>
-                <a:ea typeface="Be Vietnam Pro" pitchFamily="34" charset="-122"/>
-                <a:cs typeface="Be Vietnam Pro" pitchFamily="34" charset="-120"/>
-              </a:rPr>
-              <a:t>Tăng</a:t>
+              <a:rPr lang="en-US" sz="2700" dirty="0" spc="-37" kern="0">
+                <a:solidFill>
+                  <a:srgbClr val="E4E1D8"/>
+                </a:solidFill>
+                <a:latin typeface="Be Vietnam Pro" pitchFamily="34" charset="0"/>
+                <a:ea typeface="Be Vietnam Pro" pitchFamily="34" charset="-122"/>
+                <a:cs typeface="Be Vietnam Pro" pitchFamily="34" charset="-120"/>
+              </a:rPr>
+              <a:t>Xem</a:t>
+            </a:r>
+            <a:r>
+              <a:rPr lang="en-US" sz="2700" dirty="0" spc="-7" kern="0">
+                <a:solidFill>
+                  <a:srgbClr val="E4E1D8"/>
+                </a:solidFill>
+                <a:latin typeface="Be Vietnam Pro" pitchFamily="34" charset="0"/>
+                <a:ea typeface="Be Vietnam Pro" pitchFamily="34" charset="-122"/>
+                <a:cs typeface="Be Vietnam Pro" pitchFamily="34" charset="-120"/>
+              </a:rPr>
+              <a:t> maxmemory-policy</a:t>
+            </a:r>
+            <a:r>
+              <a:rPr lang="en-US" sz="2700" dirty="0" spc="-15" kern="0">
+                <a:solidFill>
+                  <a:srgbClr val="E4E1D8"/>
+                </a:solidFill>
+                <a:latin typeface="Be Vietnam Pro" pitchFamily="34" charset="0"/>
+                <a:ea typeface="Be Vietnam Pro" pitchFamily="34" charset="-122"/>
+                <a:cs typeface="Be Vietnam Pro" pitchFamily="34" charset="-120"/>
+              </a:rPr>
+              <a:t> và</a:t>
+            </a:r>
+            <a:r>
+              <a:rPr lang="en-US" sz="2700" dirty="0" spc="-7" kern="0">
+                <a:solidFill>
+                  <a:srgbClr val="E4E1D8"/>
+                </a:solidFill>
+                <a:latin typeface="Be Vietnam Pro" pitchFamily="34" charset="0"/>
+                <a:ea typeface="Be Vietnam Pro" pitchFamily="34" charset="-122"/>
+                <a:cs typeface="Be Vietnam Pro" pitchFamily="34" charset="-120"/>
+              </a:rPr>
+              <a:t> bộ</a:t>
+            </a:r>
+            <a:r>
+              <a:rPr lang="en-US" sz="2700" dirty="0" spc="-2" kern="0">
+                <a:solidFill>
+                  <a:srgbClr val="E4E1D8"/>
+                </a:solidFill>
+                <a:latin typeface="Be Vietnam Pro" pitchFamily="34" charset="0"/>
+                <a:ea typeface="Be Vietnam Pro" pitchFamily="34" charset="-122"/>
+                <a:cs typeface="Be Vietnam Pro" pitchFamily="34" charset="-120"/>
+              </a:rPr>
+              <a:t> nhớ</a:t>
+            </a:r>
+            <a:r>
+              <a:rPr lang="en-US" sz="2700" dirty="0" spc="16" kern="0">
+                <a:solidFill>
+                  <a:srgbClr val="E4E1D8"/>
+                </a:solidFill>
+                <a:latin typeface="Be Vietnam Pro" pitchFamily="34" charset="0"/>
+                <a:ea typeface="Be Vietnam Pro" pitchFamily="34" charset="-122"/>
+                <a:cs typeface="Be Vietnam Pro" pitchFamily="34" charset="-120"/>
+              </a:rPr>
+              <a:t> đã</a:t>
             </a:r>
             <a:r>
               <a:rPr lang="en-US" sz="2700" dirty="0" spc="-3" kern="0">
@@ -9187,73 +9231,7 @@
                 <a:ea typeface="Be Vietnam Pro" pitchFamily="34" charset="-122"/>
                 <a:cs typeface="Be Vietnam Pro" pitchFamily="34" charset="-120"/>
               </a:rPr>
-              <a:t> nhanh:</a:t>
-            </a:r>
-            <a:r>
-              <a:rPr lang="en-US" sz="2700" dirty="0" spc="-1" kern="0">
-                <a:solidFill>
-                  <a:srgbClr val="E4E1D8"/>
-                </a:solidFill>
-                <a:latin typeface="Be Vietnam Pro" pitchFamily="34" charset="0"/>
-                <a:ea typeface="Be Vietnam Pro" pitchFamily="34" charset="-122"/>
-                <a:cs typeface="Be Vietnam Pro" pitchFamily="34" charset="-120"/>
-              </a:rPr>
-              <a:t> thêm</a:t>
-            </a:r>
-            <a:r>
-              <a:rPr lang="en-US" sz="2700" dirty="0" spc="-7" kern="0">
-                <a:solidFill>
-                  <a:srgbClr val="E4E1D8"/>
-                </a:solidFill>
-                <a:latin typeface="Be Vietnam Pro" pitchFamily="34" charset="0"/>
-                <a:ea typeface="Be Vietnam Pro" pitchFamily="34" charset="-122"/>
-                <a:cs typeface="Be Vietnam Pro" pitchFamily="34" charset="-120"/>
-              </a:rPr>
-              <a:t> bộ</a:t>
-            </a:r>
-            <a:r>
-              <a:rPr lang="en-US" sz="2700" dirty="0" spc="-3" kern="0">
-                <a:solidFill>
-                  <a:srgbClr val="E4E1D8"/>
-                </a:solidFill>
-                <a:latin typeface="Be Vietnam Pro" pitchFamily="34" charset="0"/>
-                <a:ea typeface="Be Vietnam Pro" pitchFamily="34" charset="-122"/>
-                <a:cs typeface="Be Vietnam Pro" pitchFamily="34" charset="-120"/>
-              </a:rPr>
-              <a:t> nhớ</a:t>
-            </a:r>
-            <a:r>
-              <a:rPr lang="en-US" sz="2700" dirty="0" spc="0" kern="0">
-                <a:solidFill>
-                  <a:srgbClr val="E4E1D8"/>
-                </a:solidFill>
-                <a:latin typeface="Be Vietnam Pro" pitchFamily="34" charset="0"/>
-                <a:ea typeface="Be Vietnam Pro" pitchFamily="34" charset="-122"/>
-                <a:cs typeface="Be Vietnam Pro" pitchFamily="34" charset="-120"/>
-              </a:rPr>
-              <a:t> có</a:t>
-            </a:r>
-            <a:r>
-              <a:rPr lang="en-US" sz="2700" dirty="0" spc="-1" kern="0">
-                <a:solidFill>
-                  <a:srgbClr val="E4E1D8"/>
-                </a:solidFill>
-                <a:latin typeface="Be Vietnam Pro" pitchFamily="34" charset="0"/>
-                <a:ea typeface="Be Vietnam Pro" pitchFamily="34" charset="-122"/>
-                <a:cs typeface="Be Vietnam Pro" pitchFamily="34" charset="-120"/>
-              </a:rPr>
-              <a:t> thể</a:t>
-            </a:r>
-            <a:r>
-              <a:rPr lang="en-US" sz="2700" dirty="0" spc="-3" kern="0">
-                <a:solidFill>
-                  <a:srgbClr val="E4E1D8"/>
-                </a:solidFill>
-                <a:latin typeface="Be Vietnam Pro" pitchFamily="34" charset="0"/>
-                <a:ea typeface="Be Vietnam Pro" pitchFamily="34" charset="-122"/>
-                <a:cs typeface="Be Vietnam Pro" pitchFamily="34" charset="-120"/>
-              </a:rPr>
-              <a:t> giúp</a:t>
+              <a:t> dùng</a:t>
             </a:r>
             <a:endParaRPr lang="en-US" sz="2700" dirty="0"/>
           </a:p>
@@ -9270,6 +9248,94 @@
               <a:buChar char="•"/>
             </a:pPr>
             <a:r>
+              <a:rPr lang="en-US" sz="2700" dirty="0" spc="-5" kern="0">
+                <a:solidFill>
+                  <a:srgbClr val="E4E1D8"/>
+                </a:solidFill>
+                <a:latin typeface="Be Vietnam Pro" pitchFamily="34" charset="0"/>
+                <a:ea typeface="Be Vietnam Pro" pitchFamily="34" charset="-122"/>
+                <a:cs typeface="Be Vietnam Pro" pitchFamily="34" charset="-120"/>
+              </a:rPr>
+              <a:t>noeviction,</a:t>
+            </a:r>
+            <a:r>
+              <a:rPr lang="en-US" sz="2700" dirty="0" spc="-10" kern="0">
+                <a:solidFill>
+                  <a:srgbClr val="E4E1D8"/>
+                </a:solidFill>
+                <a:latin typeface="Be Vietnam Pro" pitchFamily="34" charset="0"/>
+                <a:ea typeface="Be Vietnam Pro" pitchFamily="34" charset="-122"/>
+                <a:cs typeface="Be Vietnam Pro" pitchFamily="34" charset="-120"/>
+              </a:rPr>
+              <a:t> volatile:</a:t>
+            </a:r>
+            <a:r>
+              <a:rPr lang="en-US" sz="2700" dirty="0" spc="-27" kern="0">
+                <a:solidFill>
+                  <a:srgbClr val="E4E1D8"/>
+                </a:solidFill>
+                <a:latin typeface="Be Vietnam Pro" pitchFamily="34" charset="0"/>
+                <a:ea typeface="Be Vietnam Pro" pitchFamily="34" charset="-122"/>
+                <a:cs typeface="Be Vietnam Pro" pitchFamily="34" charset="-120"/>
+              </a:rPr>
+              <a:t> evicted_keys</a:t>
+            </a:r>
+            <a:r>
+              <a:rPr lang="en-US" sz="2700" dirty="0" spc="-2" kern="0">
+                <a:solidFill>
+                  <a:srgbClr val="E4E1D8"/>
+                </a:solidFill>
+                <a:latin typeface="Be Vietnam Pro" pitchFamily="34" charset="0"/>
+                <a:ea typeface="Be Vietnam Pro" pitchFamily="34" charset="-122"/>
+                <a:cs typeface="Be Vietnam Pro" pitchFamily="34" charset="-120"/>
+              </a:rPr>
+              <a:t> luôn</a:t>
+            </a:r>
+            <a:r>
+              <a:rPr lang="en-US" sz="2700" dirty="0" spc="1" kern="0">
+                <a:solidFill>
+                  <a:srgbClr val="E4E1D8"/>
+                </a:solidFill>
+                <a:latin typeface="Be Vietnam Pro" pitchFamily="34" charset="0"/>
+                <a:ea typeface="Be Vietnam Pro" pitchFamily="34" charset="-122"/>
+                <a:cs typeface="Be Vietnam Pro" pitchFamily="34" charset="-120"/>
+              </a:rPr>
+              <a:t> 0,</a:t>
+            </a:r>
+            <a:r>
+              <a:rPr lang="en-US" sz="2700" dirty="0" spc="-21" kern="0">
+                <a:solidFill>
+                  <a:srgbClr val="E4E1D8"/>
+                </a:solidFill>
+                <a:latin typeface="Be Vietnam Pro" pitchFamily="34" charset="0"/>
+                <a:ea typeface="Be Vietnam Pro" pitchFamily="34" charset="-122"/>
+                <a:cs typeface="Be Vietnam Pro" pitchFamily="34" charset="-120"/>
+              </a:rPr>
+              <a:t> xem</a:t>
+            </a:r>
+            <a:r>
+              <a:rPr lang="en-US" sz="2700" dirty="0" spc="-3" kern="0">
+                <a:solidFill>
+                  <a:srgbClr val="E4E1D8"/>
+                </a:solidFill>
+                <a:latin typeface="Be Vietnam Pro" pitchFamily="34" charset="0"/>
+                <a:ea typeface="Be Vietnam Pro" pitchFamily="34" charset="-122"/>
+                <a:cs typeface="Be Vietnam Pro" pitchFamily="34" charset="-120"/>
+              </a:rPr>
+              <a:t> lệnh bị</a:t>
+            </a:r>
+            <a:r>
+              <a:rPr lang="en-US" sz="2700" dirty="0" spc="-1" kern="0">
+                <a:solidFill>
+                  <a:srgbClr val="E4E1D8"/>
+                </a:solidFill>
+                <a:latin typeface="Be Vietnam Pro" pitchFamily="34" charset="0"/>
+                <a:ea typeface="Be Vietnam Pro" pitchFamily="34" charset="-122"/>
+                <a:cs typeface="Be Vietnam Pro" pitchFamily="34" charset="-120"/>
+              </a:rPr>
+              <a:t> từ</a:t>
+            </a:r>
+            <a:r>
               <a:rPr lang="en-US" sz="2700" dirty="0" spc="0" kern="0">
                 <a:solidFill>
                   <a:srgbClr val="E4E1D8"/>
@@ -9278,106 +9344,7 @@
                 <a:ea typeface="Be Vietnam Pro" pitchFamily="34" charset="-122"/>
                 <a:cs typeface="Be Vietnam Pro" pitchFamily="34" charset="-120"/>
               </a:rPr>
-              <a:t>Gần</a:t>
-            </a:r>
-            <a:r>
-              <a:rPr lang="en-US" sz="2700" dirty="0" spc="-1" kern="0">
-                <a:solidFill>
-                  <a:srgbClr val="E4E1D8"/>
-                </a:solidFill>
-                <a:latin typeface="Be Vietnam Pro" pitchFamily="34" charset="0"/>
-                <a:ea typeface="Be Vietnam Pro" pitchFamily="34" charset="-122"/>
-                <a:cs typeface="Be Vietnam Pro" pitchFamily="34" charset="-120"/>
-              </a:rPr>
-              <a:t> như</a:t>
-            </a:r>
-            <a:r>
-              <a:rPr lang="en-US" sz="2700" dirty="0" spc="-2" kern="0">
-                <a:solidFill>
-                  <a:srgbClr val="E4E1D8"/>
-                </a:solidFill>
-                <a:latin typeface="Be Vietnam Pro" pitchFamily="34" charset="0"/>
-                <a:ea typeface="Be Vietnam Pro" pitchFamily="34" charset="-122"/>
-                <a:cs typeface="Be Vietnam Pro" pitchFamily="34" charset="-120"/>
-              </a:rPr>
-              <a:t> không</a:t>
-            </a:r>
-            <a:r>
-              <a:rPr lang="en-US" sz="2700" dirty="0" spc="-10" kern="0">
-                <a:solidFill>
-                  <a:srgbClr val="E4E1D8"/>
-                </a:solidFill>
-                <a:latin typeface="Be Vietnam Pro" pitchFamily="34" charset="0"/>
-                <a:ea typeface="Be Vietnam Pro" pitchFamily="34" charset="-122"/>
-                <a:cs typeface="Be Vietnam Pro" pitchFamily="34" charset="-120"/>
-              </a:rPr>
-              <a:t> tăng:</a:t>
-            </a:r>
-            <a:r>
-              <a:rPr lang="en-US" sz="2700" dirty="0" spc="-1" kern="0">
-                <a:solidFill>
-                  <a:srgbClr val="E4E1D8"/>
-                </a:solidFill>
-                <a:latin typeface="Be Vietnam Pro" pitchFamily="34" charset="0"/>
-                <a:ea typeface="Be Vietnam Pro" pitchFamily="34" charset="-122"/>
-                <a:cs typeface="Be Vietnam Pro" pitchFamily="34" charset="-120"/>
-              </a:rPr>
-              <a:t> thêm</a:t>
-            </a:r>
-            <a:r>
-              <a:rPr lang="en-US" sz="2700" dirty="0" spc="-7" kern="0">
-                <a:solidFill>
-                  <a:srgbClr val="E4E1D8"/>
-                </a:solidFill>
-                <a:latin typeface="Be Vietnam Pro" pitchFamily="34" charset="0"/>
-                <a:ea typeface="Be Vietnam Pro" pitchFamily="34" charset="-122"/>
-                <a:cs typeface="Be Vietnam Pro" pitchFamily="34" charset="-120"/>
-              </a:rPr>
-              <a:t> bộ</a:t>
-            </a:r>
-            <a:r>
-              <a:rPr lang="en-US" sz="2700" dirty="0" spc="-3" kern="0">
-                <a:solidFill>
-                  <a:srgbClr val="E4E1D8"/>
-                </a:solidFill>
-                <a:latin typeface="Be Vietnam Pro" pitchFamily="34" charset="0"/>
-                <a:ea typeface="Be Vietnam Pro" pitchFamily="34" charset="-122"/>
-                <a:cs typeface="Be Vietnam Pro" pitchFamily="34" charset="-120"/>
-              </a:rPr>
-              <a:t> nhớ</a:t>
-            </a:r>
-            <a:r>
-              <a:rPr lang="en-US" sz="2700" dirty="0" spc="-15" kern="0">
-                <a:solidFill>
-                  <a:srgbClr val="E4E1D8"/>
-                </a:solidFill>
-                <a:latin typeface="Be Vietnam Pro" pitchFamily="34" charset="0"/>
-                <a:ea typeface="Be Vietnam Pro" pitchFamily="34" charset="-122"/>
-                <a:cs typeface="Be Vietnam Pro" pitchFamily="34" charset="-120"/>
-              </a:rPr>
-              <a:t> gần</a:t>
-            </a:r>
-            <a:r>
-              <a:rPr lang="en-US" sz="2700" dirty="0" spc="-1" kern="0">
-                <a:solidFill>
-                  <a:srgbClr val="E4E1D8"/>
-                </a:solidFill>
-                <a:latin typeface="Be Vietnam Pro" pitchFamily="34" charset="0"/>
-                <a:ea typeface="Be Vietnam Pro" pitchFamily="34" charset="-122"/>
-                <a:cs typeface="Be Vietnam Pro" pitchFamily="34" charset="-120"/>
-              </a:rPr>
-              <a:t> như</a:t>
-            </a:r>
-            <a:r>
-              <a:rPr lang="en-US" sz="2700" dirty="0" spc="-2" kern="0">
-                <a:solidFill>
-                  <a:srgbClr val="E4E1D8"/>
-                </a:solidFill>
-                <a:latin typeface="Be Vietnam Pro" pitchFamily="34" charset="0"/>
-                <a:ea typeface="Be Vietnam Pro" pitchFamily="34" charset="-122"/>
-                <a:cs typeface="Be Vietnam Pro" pitchFamily="34" charset="-120"/>
-              </a:rPr>
-              <a:t> không giúp</a:t>
+              <a:t> chối</a:t>
             </a:r>
             <a:endParaRPr lang="en-US" sz="2700" dirty="0"/>
           </a:p>
@@ -9391,37 +9358,59 @@
               <a:buChar char="•"/>
             </a:pPr>
             <a:r>
-              <a:rPr lang="en-US" sz="2700" dirty="0" spc="-6" kern="0">
-                <a:solidFill>
-                  <a:srgbClr val="E4E1D8"/>
-                </a:solidFill>
-                <a:latin typeface="Be Vietnam Pro" pitchFamily="34" charset="0"/>
-                <a:ea typeface="Be Vietnam Pro" pitchFamily="34" charset="-122"/>
-                <a:cs typeface="Be Vietnam Pro" pitchFamily="34" charset="-120"/>
-              </a:rPr>
-              <a:t>noeviction:</a:t>
-            </a:r>
-            <a:r>
-              <a:rPr lang="en-US" sz="2700" dirty="0" spc="-20" kern="0">
-                <a:solidFill>
-                  <a:srgbClr val="E4E1D8"/>
-                </a:solidFill>
-                <a:latin typeface="Be Vietnam Pro" pitchFamily="34" charset="0"/>
-                <a:ea typeface="Be Vietnam Pro" pitchFamily="34" charset="-122"/>
-                <a:cs typeface="Be Vietnam Pro" pitchFamily="34" charset="-120"/>
-              </a:rPr>
-              <a:t> xem</a:t>
-            </a:r>
-            <a:r>
-              <a:rPr lang="en-US" sz="2700" dirty="0" spc="-13" kern="0">
-                <a:solidFill>
-                  <a:srgbClr val="E4E1D8"/>
-                </a:solidFill>
-                <a:latin typeface="Be Vietnam Pro" pitchFamily="34" charset="0"/>
-                <a:ea typeface="Be Vietnam Pro" pitchFamily="34" charset="-122"/>
-                <a:cs typeface="Be Vietnam Pro" pitchFamily="34" charset="-120"/>
-              </a:rPr>
-              <a:t> số</a:t>
+              <a:rPr lang="en-US" sz="2700" dirty="0" spc="1" kern="0">
+                <a:solidFill>
+                  <a:srgbClr val="E4E1D8"/>
+                </a:solidFill>
+                <a:latin typeface="Be Vietnam Pro" pitchFamily="34" charset="0"/>
+                <a:ea typeface="Be Vietnam Pro" pitchFamily="34" charset="-122"/>
+                <a:cs typeface="Be Vietnam Pro" pitchFamily="34" charset="-120"/>
+              </a:rPr>
+              <a:t>Có</a:t>
+            </a:r>
+            <a:r>
+              <a:rPr lang="en-US" sz="2700" dirty="0" spc="2" kern="0">
+                <a:solidFill>
+                  <a:srgbClr val="E4E1D8"/>
+                </a:solidFill>
+                <a:latin typeface="Be Vietnam Pro" pitchFamily="34" charset="0"/>
+                <a:ea typeface="Be Vietnam Pro" pitchFamily="34" charset="-122"/>
+                <a:cs typeface="Be Vietnam Pro" pitchFamily="34" charset="-120"/>
+              </a:rPr>
+              <a:t> đẩy</a:t>
+            </a:r>
+            <a:r>
+              <a:rPr lang="en-US" sz="2700" dirty="0" spc="-4" kern="0">
+                <a:solidFill>
+                  <a:srgbClr val="E4E1D8"/>
+                </a:solidFill>
+                <a:latin typeface="Be Vietnam Pro" pitchFamily="34" charset="0"/>
+                <a:ea typeface="Be Vietnam Pro" pitchFamily="34" charset="-122"/>
+                <a:cs typeface="Be Vietnam Pro" pitchFamily="34" charset="-120"/>
+              </a:rPr>
+              <a:t> khóa:</a:t>
+            </a:r>
+            <a:r>
+              <a:rPr lang="en-US" sz="2700" dirty="0" spc="-27" kern="0">
+                <a:solidFill>
+                  <a:srgbClr val="E4E1D8"/>
+                </a:solidFill>
+                <a:latin typeface="Be Vietnam Pro" pitchFamily="34" charset="0"/>
+                <a:ea typeface="Be Vietnam Pro" pitchFamily="34" charset="-122"/>
+                <a:cs typeface="Be Vietnam Pro" pitchFamily="34" charset="-120"/>
+              </a:rPr>
+              <a:t> evicted_keys</a:t>
+            </a:r>
+            <a:r>
+              <a:rPr lang="en-US" sz="2700" dirty="0" spc="-12" kern="0">
+                <a:solidFill>
+                  <a:srgbClr val="E4E1D8"/>
+                </a:solidFill>
+                <a:latin typeface="Be Vietnam Pro" pitchFamily="34" charset="0"/>
+                <a:ea typeface="Be Vietnam Pro" pitchFamily="34" charset="-122"/>
+                <a:cs typeface="Be Vietnam Pro" pitchFamily="34" charset="-120"/>
+              </a:rPr>
+              <a:t> tăng</a:t>
             </a:r>
             <a:r>
               <a:rPr lang="en-US" sz="2700" dirty="0" spc="-2" kern="0">
@@ -9432,18 +9421,7 @@
                 <a:ea typeface="Be Vietnam Pro" pitchFamily="34" charset="-122"/>
                 <a:cs typeface="Be Vietnam Pro" pitchFamily="34" charset="-120"/>
               </a:rPr>
-              <a:t> lệnh</a:t>
-            </a:r>
-            <a:r>
-              <a:rPr lang="en-US" sz="2700" dirty="0" spc="-4" kern="0">
-                <a:solidFill>
-                  <a:srgbClr val="E4E1D8"/>
-                </a:solidFill>
-                <a:latin typeface="Be Vietnam Pro" pitchFamily="34" charset="0"/>
-                <a:ea typeface="Be Vietnam Pro" pitchFamily="34" charset="-122"/>
-                <a:cs typeface="Be Vietnam Pro" pitchFamily="34" charset="-120"/>
-              </a:rPr>
-              <a:t> bị</a:t>
+              <a:t> nhanh thì</a:t>
             </a:r>
             <a:r>
               <a:rPr lang="en-US" sz="2700" dirty="0" spc="-1" kern="0">
@@ -9454,18 +9432,29 @@
                 <a:ea typeface="Be Vietnam Pro" pitchFamily="34" charset="-122"/>
                 <a:cs typeface="Be Vietnam Pro" pitchFamily="34" charset="-120"/>
               </a:rPr>
-              <a:t> từ</a:t>
-            </a:r>
-            <a:r>
-              <a:rPr lang="en-US" sz="2700" dirty="0" spc="0" kern="0">
-                <a:solidFill>
-                  <a:srgbClr val="E4E1D8"/>
-                </a:solidFill>
-                <a:latin typeface="Be Vietnam Pro" pitchFamily="34" charset="0"/>
-                <a:ea typeface="Be Vietnam Pro" pitchFamily="34" charset="-122"/>
-                <a:cs typeface="Be Vietnam Pro" pitchFamily="34" charset="-120"/>
-              </a:rPr>
-              <a:t> chối</a:t>
+              <a:t> thêm</a:t>
+            </a:r>
+            <a:r>
+              <a:rPr lang="en-US" sz="2700" dirty="0" spc="-7" kern="0">
+                <a:solidFill>
+                  <a:srgbClr val="E4E1D8"/>
+                </a:solidFill>
+                <a:latin typeface="Be Vietnam Pro" pitchFamily="34" charset="0"/>
+                <a:ea typeface="Be Vietnam Pro" pitchFamily="34" charset="-122"/>
+                <a:cs typeface="Be Vietnam Pro" pitchFamily="34" charset="-120"/>
+              </a:rPr>
+              <a:t> bộ</a:t>
+            </a:r>
+            <a:r>
+              <a:rPr lang="en-US" sz="2700" dirty="0" spc="-3" kern="0">
+                <a:solidFill>
+                  <a:srgbClr val="E4E1D8"/>
+                </a:solidFill>
+                <a:latin typeface="Be Vietnam Pro" pitchFamily="34" charset="0"/>
+                <a:ea typeface="Be Vietnam Pro" pitchFamily="34" charset="-122"/>
+                <a:cs typeface="Be Vietnam Pro" pitchFamily="34" charset="-120"/>
+              </a:rPr>
+              <a:t> nhớ</a:t>
             </a:r>
             <a:endParaRPr lang="en-US" sz="2700" dirty="0"/>
           </a:p>

--- a/system-design-101/vi/lessons/sd-06-009/slides/sd-06-009.pptx
+++ b/system-design-101/vi/lessons/sd-06-009/slides/sd-06-009.pptx
@@ -7636,29 +7636,7 @@
               <a:t> của</a:t>
             </a:r>
             <a:r>
-              <a:rPr lang="en-US" sz="3450" dirty="0" spc="-5" kern="0">
-                <a:solidFill>
-                  <a:srgbClr val="14161C"/>
-                </a:solidFill>
-                <a:latin typeface="Be Vietnam Pro SemiBold" pitchFamily="34" charset="0"/>
-                <a:ea typeface="Be Vietnam Pro SemiBold" pitchFamily="34" charset="-122"/>
-                <a:cs typeface="Be Vietnam Pro SemiBold" pitchFamily="34" charset="-120"/>
-              </a:rPr>
-              <a:t> hệ</a:t>
-            </a:r>
-            <a:r>
-              <a:rPr lang="en-US" sz="3450" dirty="0" spc="-8" kern="0">
-                <a:solidFill>
-                  <a:srgbClr val="14161C"/>
-                </a:solidFill>
-                <a:latin typeface="Be Vietnam Pro SemiBold" pitchFamily="34" charset="0"/>
-                <a:ea typeface="Be Vietnam Pro SemiBold" pitchFamily="34" charset="-122"/>
-                <a:cs typeface="Be Vietnam Pro SemiBold" pitchFamily="34" charset="-120"/>
-              </a:rPr>
-              <a:t> thống</a:t>
-            </a:r>
-            <a:r>
-              <a:rPr lang="en-US" sz="3450" dirty="0" spc="-3" kern="0">
+              <a:rPr lang="en-US" sz="3450" dirty="0" spc="-2" kern="0">
                 <a:solidFill>
                   <a:srgbClr val="14161C"/>
                 </a:solidFill>
@@ -8018,7 +7996,7 @@
               <a:t> liệu</a:t>
             </a:r>
             <a:r>
-              <a:rPr lang="en-US" sz="3450" dirty="0" spc="-1" kern="0">
+              <a:rPr lang="en-US" sz="3450" dirty="0" spc="1" kern="0">
                 <a:solidFill>
                   <a:srgbClr val="14161C"/>
                 </a:solidFill>
@@ -8026,10 +8004,10 @@
                 <a:ea typeface="Be Vietnam Pro SemiBold" pitchFamily="34" charset="-122"/>
                 <a:cs typeface="Be Vietnam Pro SemiBold" pitchFamily="34" charset="-120"/>
               </a:rPr>
-              <a:t> có</a:t>
-            </a:r>
-            <a:r>
-              <a:rPr lang="en-US" sz="3450" dirty="0" spc="-5" kern="0">
+              <a:t> cũ,</a:t>
+            </a:r>
+            <a:r>
+              <a:rPr lang="en-US" sz="3450" dirty="0" spc="-11" kern="0">
                 <a:solidFill>
                   <a:srgbClr val="14161C"/>
                 </a:solidFill>
@@ -8037,10 +8015,10 @@
                 <a:ea typeface="Be Vietnam Pro SemiBold" pitchFamily="34" charset="-122"/>
                 <a:cs typeface="Be Vietnam Pro SemiBold" pitchFamily="34" charset="-120"/>
               </a:rPr>
-              <a:t> thể</a:t>
-            </a:r>
-            <a:r>
-              <a:rPr lang="en-US" sz="3450" dirty="0" spc="1" kern="0">
+              <a:t> một</a:t>
+            </a:r>
+            <a:r>
+              <a:rPr lang="en-US" sz="3450" dirty="0" spc="-5" kern="0">
                 <a:solidFill>
                   <a:srgbClr val="14161C"/>
                 </a:solidFill>
@@ -8048,10 +8026,10 @@
                 <a:ea typeface="Be Vietnam Pro SemiBold" pitchFamily="34" charset="-122"/>
                 <a:cs typeface="Be Vietnam Pro SemiBold" pitchFamily="34" charset="-120"/>
               </a:rPr>
-              <a:t> cũ,</a:t>
-            </a:r>
-            <a:r>
-              <a:rPr lang="en-US" sz="3450" dirty="0" spc="-11" kern="0">
+              <a:t> hệ</a:t>
+            </a:r>
+            <a:r>
+              <a:rPr lang="en-US" sz="3450" dirty="0" spc="-8" kern="0">
                 <a:solidFill>
                   <a:srgbClr val="14161C"/>
                 </a:solidFill>
@@ -8059,32 +8037,10 @@
                 <a:ea typeface="Be Vietnam Pro SemiBold" pitchFamily="34" charset="-122"/>
                 <a:cs typeface="Be Vietnam Pro SemiBold" pitchFamily="34" charset="-120"/>
               </a:rPr>
-              <a:t> một</a:t>
-            </a:r>
-            <a:r>
-              <a:rPr lang="en-US" sz="3450" dirty="0" spc="-5" kern="0">
-                <a:solidFill>
-                  <a:srgbClr val="14161C"/>
-                </a:solidFill>
-                <a:latin typeface="Be Vietnam Pro SemiBold" pitchFamily="34" charset="0"/>
-                <a:ea typeface="Be Vietnam Pro SemiBold" pitchFamily="34" charset="-122"/>
-                <a:cs typeface="Be Vietnam Pro SemiBold" pitchFamily="34" charset="-120"/>
-              </a:rPr>
-              <a:t> hệ</a:t>
-            </a:r>
-            <a:r>
-              <a:rPr lang="en-US" sz="3450" dirty="0" spc="-9" kern="0">
-                <a:solidFill>
-                  <a:srgbClr val="14161C"/>
-                </a:solidFill>
-                <a:latin typeface="Be Vietnam Pro SemiBold" pitchFamily="34" charset="0"/>
-                <a:ea typeface="Be Vietnam Pro SemiBold" pitchFamily="34" charset="-122"/>
-                <a:cs typeface="Be Vietnam Pro SemiBold" pitchFamily="34" charset="-120"/>
-              </a:rPr>
               <a:t> thống</a:t>
             </a:r>
             <a:r>
-              <a:rPr lang="en-US" sz="3450" dirty="0" spc="18" kern="0">
+              <a:rPr lang="en-US" sz="3450" dirty="0" spc="17" kern="0">
                 <a:solidFill>
                   <a:srgbClr val="14161C"/>
                 </a:solidFill>
@@ -8701,26 +8657,15 @@
               <a:buNone/>
             </a:pPr>
             <a:r>
-              <a:rPr lang="en-US" sz="2850" dirty="0" spc="-127" kern="0">
-                <a:solidFill>
-                  <a:srgbClr val="E4E1D8"/>
-                </a:solidFill>
-                <a:latin typeface="Be Vietnam Pro" pitchFamily="34" charset="0"/>
-                <a:ea typeface="Be Vietnam Pro" pitchFamily="34" charset="-122"/>
-                <a:cs typeface="Be Vietnam Pro" pitchFamily="34" charset="-120"/>
-              </a:rPr>
-              <a:t>Tỷ</a:t>
-            </a:r>
-            <a:r>
-              <a:rPr lang="en-US" sz="2850" dirty="0" spc="1" kern="0">
-                <a:solidFill>
-                  <a:srgbClr val="E4E1D8"/>
-                </a:solidFill>
-                <a:latin typeface="Be Vietnam Pro" pitchFamily="34" charset="0"/>
-                <a:ea typeface="Be Vietnam Pro" pitchFamily="34" charset="-122"/>
-                <a:cs typeface="Be Vietnam Pro" pitchFamily="34" charset="-120"/>
-              </a:rPr>
-              <a:t> lệ</a:t>
+              <a:rPr lang="en-US" sz="2850" dirty="0" spc="-2" kern="0">
+                <a:solidFill>
+                  <a:srgbClr val="E4E1D8"/>
+                </a:solidFill>
+                <a:latin typeface="Be Vietnam Pro" pitchFamily="34" charset="0"/>
+                <a:ea typeface="Be Vietnam Pro" pitchFamily="34" charset="-122"/>
+                <a:cs typeface="Be Vietnam Pro" pitchFamily="34" charset="-120"/>
+              </a:rPr>
+              <a:t>Hiện</a:t>
             </a:r>
             <a:r>
               <a:rPr lang="en-US" sz="2850" dirty="0" spc="-1" kern="0">
@@ -8734,29 +8679,18 @@
               <a:t> trúng</a:t>
             </a:r>
             <a:r>
-              <a:rPr lang="en-US" sz="2850" dirty="0" spc="0" kern="0">
-                <a:solidFill>
-                  <a:srgbClr val="E4E1D8"/>
-                </a:solidFill>
-                <a:latin typeface="Be Vietnam Pro" pitchFamily="34" charset="0"/>
-                <a:ea typeface="Be Vietnam Pro" pitchFamily="34" charset="-122"/>
-                <a:cs typeface="Be Vietnam Pro" pitchFamily="34" charset="-120"/>
-              </a:rPr>
-              <a:t> hiện</a:t>
-            </a:r>
-            <a:r>
-              <a:rPr lang="en-US" sz="2850" dirty="0" spc="-11" kern="0">
-                <a:solidFill>
-                  <a:srgbClr val="E4E1D8"/>
-                </a:solidFill>
-                <a:latin typeface="Be Vietnam Pro" pitchFamily="34" charset="0"/>
-                <a:ea typeface="Be Vietnam Pro" pitchFamily="34" charset="-122"/>
-                <a:cs typeface="Be Vietnam Pro" pitchFamily="34" charset="-120"/>
-              </a:rPr>
-              <a:t> tại;</a:t>
-            </a:r>
-            <a:r>
-              <a:rPr lang="en-US" sz="2850" dirty="0" spc="10" kern="0">
+              <a:rPr lang="en-US" sz="2850" dirty="0" spc="-27" kern="0">
+                <a:solidFill>
+                  <a:srgbClr val="E4E1D8"/>
+                </a:solidFill>
+                <a:latin typeface="Be Vietnam Pro" pitchFamily="34" charset="0"/>
+                <a:ea typeface="Be Vietnam Pro" pitchFamily="34" charset="-122"/>
+                <a:cs typeface="Be Vietnam Pro" pitchFamily="34" charset="-120"/>
+              </a:rPr>
+              <a:t> 70%;</a:t>
+            </a:r>
+            <a:r>
+              <a:rPr lang="en-US" sz="2850" dirty="0" spc="9" kern="0">
                 <a:solidFill>
                   <a:srgbClr val="E4E1D8"/>
                 </a:solidFill>
@@ -8778,7 +8712,7 @@
               <a:t> nghiệp</a:t>
             </a:r>
             <a:r>
-              <a:rPr lang="en-US" sz="2850" dirty="0" spc="19" kern="0">
+              <a:rPr lang="en-US" sz="2850" dirty="0" spc="20" kern="0">
                 <a:solidFill>
                   <a:srgbClr val="E4E1D8"/>
                 </a:solidFill>

--- a/system-design-101/vi/lessons/sd-06-009/slides/sd-06-009.pptx
+++ b/system-design-101/vi/lessons/sd-06-009/slides/sd-06-009.pptx
@@ -2767,7 +2767,7 @@
               <a:t> một</a:t>
             </a:r>
             <a:r>
-              <a:rPr lang="en-US" sz="9900" dirty="0" spc="-101" kern="0">
+              <a:rPr lang="en-US" sz="9900" dirty="0" spc="-81" kern="0">
                 <a:solidFill>
                   <a:srgbClr val="14161C"/>
                 </a:solidFill>
@@ -2775,29 +2775,7 @@
                 <a:ea typeface="Bricolage Grotesque ExtraBold" pitchFamily="34" charset="-122"/>
                 <a:cs typeface="Bricolage Grotesque ExtraBold" pitchFamily="34" charset="-120"/>
               </a:rPr>
-              <a:t> mức</a:t>
-            </a:r>
-            <a:r>
-              <a:rPr lang="en-US" sz="9900" dirty="0" spc="3" kern="0">
-                <a:solidFill>
-                  <a:srgbClr val="14161C"/>
-                </a:solidFill>
-                <a:latin typeface="Bricolage Grotesque ExtraBold" pitchFamily="34" charset="0"/>
-                <a:ea typeface="Bricolage Grotesque ExtraBold" pitchFamily="34" charset="-122"/>
-                <a:cs typeface="Bricolage Grotesque ExtraBold" pitchFamily="34" charset="-120"/>
-              </a:rPr>
-              <a:t> nào</a:t>
-            </a:r>
-            <a:r>
-              <a:rPr lang="en-US" sz="9900" dirty="0" spc="-19" kern="0">
-                <a:solidFill>
-                  <a:srgbClr val="14161C"/>
-                </a:solidFill>
-                <a:latin typeface="Bricolage Grotesque ExtraBold" pitchFamily="34" charset="0"/>
-                <a:ea typeface="Bricolage Grotesque ExtraBold" pitchFamily="34" charset="-122"/>
-                <a:cs typeface="Bricolage Grotesque ExtraBold" pitchFamily="34" charset="-120"/>
-              </a:rPr>
-              <a:t> đó,</a:t>
+              <a:t> mức,</a:t>
             </a:r>
             <a:r>
               <a:rPr lang="en-US" sz="9900" dirty="0" spc="6" kern="0">
@@ -8657,15 +8635,37 @@
               <a:buNone/>
             </a:pPr>
             <a:r>
-              <a:rPr lang="en-US" sz="2850" dirty="0" spc="-2" kern="0">
-                <a:solidFill>
-                  <a:srgbClr val="E4E1D8"/>
-                </a:solidFill>
-                <a:latin typeface="Be Vietnam Pro" pitchFamily="34" charset="0"/>
-                <a:ea typeface="Be Vietnam Pro" pitchFamily="34" charset="-122"/>
-                <a:cs typeface="Be Vietnam Pro" pitchFamily="34" charset="-120"/>
-              </a:rPr>
-              <a:t>Hiện</a:t>
+              <a:rPr lang="en-US" sz="2850" dirty="0" spc="-41" kern="0">
+                <a:solidFill>
+                  <a:srgbClr val="E4E1D8"/>
+                </a:solidFill>
+                <a:latin typeface="Be Vietnam Pro" pitchFamily="34" charset="0"/>
+                <a:ea typeface="Be Vietnam Pro" pitchFamily="34" charset="-122"/>
+                <a:cs typeface="Be Vietnam Pro" pitchFamily="34" charset="-120"/>
+              </a:rPr>
+              <a:t>Trúng</a:t>
+            </a:r>
+            <a:r>
+              <a:rPr lang="en-US" sz="2850" dirty="0" spc="-27" kern="0">
+                <a:solidFill>
+                  <a:srgbClr val="E4E1D8"/>
+                </a:solidFill>
+                <a:latin typeface="Be Vietnam Pro" pitchFamily="34" charset="0"/>
+                <a:ea typeface="Be Vietnam Pro" pitchFamily="34" charset="-122"/>
+                <a:cs typeface="Be Vietnam Pro" pitchFamily="34" charset="-120"/>
+              </a:rPr>
+              <a:t> 70%;</a:t>
+            </a:r>
+            <a:r>
+              <a:rPr lang="en-US" sz="2850" dirty="0" spc="10" kern="0">
+                <a:solidFill>
+                  <a:srgbClr val="E4E1D8"/>
+                </a:solidFill>
+                <a:latin typeface="Be Vietnam Pro" pitchFamily="34" charset="0"/>
+                <a:ea typeface="Be Vietnam Pro" pitchFamily="34" charset="-122"/>
+                <a:cs typeface="Be Vietnam Pro" pitchFamily="34" charset="-120"/>
+              </a:rPr>
+              <a:t> đồng</a:t>
             </a:r>
             <a:r>
               <a:rPr lang="en-US" sz="2850" dirty="0" spc="-1" kern="0">
@@ -8676,43 +8676,10 @@
                 <a:ea typeface="Be Vietnam Pro" pitchFamily="34" charset="-122"/>
                 <a:cs typeface="Be Vietnam Pro" pitchFamily="34" charset="-120"/>
               </a:rPr>
-              <a:t> trúng</a:t>
-            </a:r>
-            <a:r>
-              <a:rPr lang="en-US" sz="2850" dirty="0" spc="-27" kern="0">
-                <a:solidFill>
-                  <a:srgbClr val="E4E1D8"/>
-                </a:solidFill>
-                <a:latin typeface="Be Vietnam Pro" pitchFamily="34" charset="0"/>
-                <a:ea typeface="Be Vietnam Pro" pitchFamily="34" charset="-122"/>
-                <a:cs typeface="Be Vietnam Pro" pitchFamily="34" charset="-120"/>
-              </a:rPr>
-              <a:t> 70%;</a:t>
-            </a:r>
-            <a:r>
-              <a:rPr lang="en-US" sz="2850" dirty="0" spc="9" kern="0">
-                <a:solidFill>
-                  <a:srgbClr val="E4E1D8"/>
-                </a:solidFill>
-                <a:latin typeface="Be Vietnam Pro" pitchFamily="34" charset="0"/>
-                <a:ea typeface="Be Vietnam Pro" pitchFamily="34" charset="-122"/>
-                <a:cs typeface="Be Vietnam Pro" pitchFamily="34" charset="-120"/>
-              </a:rPr>
-              <a:t> đồng</a:t>
-            </a:r>
-            <a:r>
-              <a:rPr lang="en-US" sz="2850" dirty="0" spc="-1" kern="0">
-                <a:solidFill>
-                  <a:srgbClr val="E4E1D8"/>
-                </a:solidFill>
-                <a:latin typeface="Be Vietnam Pro" pitchFamily="34" charset="0"/>
-                <a:ea typeface="Be Vietnam Pro" pitchFamily="34" charset="-122"/>
-                <a:cs typeface="Be Vietnam Pro" pitchFamily="34" charset="-120"/>
-              </a:rPr>
               <a:t> nghiệp</a:t>
             </a:r>
             <a:r>
-              <a:rPr lang="en-US" sz="2850" dirty="0" spc="20" kern="0">
+              <a:rPr lang="en-US" sz="2850" dirty="0" spc="19" kern="0">
                 <a:solidFill>
                   <a:srgbClr val="E4E1D8"/>
                 </a:solidFill>

--- a/system-design-101/vi/lessons/sd-06-009/slides/sd-06-009.pptx
+++ b/system-design-101/vi/lessons/sd-06-009/slides/sd-06-009.pptx
@@ -4186,29 +4186,18 @@
               <a:t> có thể</a:t>
             </a:r>
             <a:r>
+              <a:rPr lang="en-US" sz="2700" dirty="0" spc="-10" kern="0">
+                <a:solidFill>
+                  <a:srgbClr val="E4E1D8"/>
+                </a:solidFill>
+                <a:latin typeface="Be Vietnam Pro" pitchFamily="34" charset="0"/>
+                <a:ea typeface="Be Vietnam Pro" pitchFamily="34" charset="-122"/>
+                <a:cs typeface="Be Vietnam Pro" pitchFamily="34" charset="-120"/>
+              </a:rPr>
+              <a:t> mất;</a:t>
+            </a:r>
+            <a:r>
               <a:rPr lang="en-US" sz="2700" dirty="0" spc="-3" kern="0">
-                <a:solidFill>
-                  <a:srgbClr val="E4E1D8"/>
-                </a:solidFill>
-                <a:latin typeface="Be Vietnam Pro" pitchFamily="34" charset="0"/>
-                <a:ea typeface="Be Vietnam Pro" pitchFamily="34" charset="-122"/>
-                <a:cs typeface="Be Vietnam Pro" pitchFamily="34" charset="-120"/>
-              </a:rPr>
-              <a:t> biến</a:t>
-            </a:r>
-            <a:r>
-              <a:rPr lang="en-US" sz="2700" dirty="0" spc="-9" kern="0">
-                <a:solidFill>
-                  <a:srgbClr val="E4E1D8"/>
-                </a:solidFill>
-                <a:latin typeface="Be Vietnam Pro" pitchFamily="34" charset="0"/>
-                <a:ea typeface="Be Vietnam Pro" pitchFamily="34" charset="-122"/>
-                <a:cs typeface="Be Vietnam Pro" pitchFamily="34" charset="-120"/>
-              </a:rPr>
-              <a:t> mất;</a:t>
-            </a:r>
-            <a:r>
-              <a:rPr lang="en-US" sz="2700" dirty="0" spc="-4" kern="0">
                 <a:solidFill>
                   <a:srgbClr val="E4E1D8"/>
                 </a:solidFill>
@@ -8798,7 +8787,7 @@
               <a:buNone/>
             </a:pPr>
             <a:r>
-              <a:rPr lang="en-US" sz="3600" dirty="0" spc="-65" kern="0">
+              <a:rPr lang="en-US" sz="3600" dirty="0" spc="-61" kern="0">
                 <a:solidFill>
                   <a:srgbClr val="14161C"/>
                 </a:solidFill>
@@ -8806,10 +8795,10 @@
                 <a:ea typeface="Bricolage Grotesque ExtraBold" pitchFamily="34" charset="-122"/>
                 <a:cs typeface="Bricolage Grotesque ExtraBold" pitchFamily="34" charset="-120"/>
               </a:rPr>
-              <a:t>Xem</a:t>
-            </a:r>
-            <a:r>
-              <a:rPr lang="en-US" sz="3600" dirty="0" spc="-13" kern="0">
+              <a:t>Trước</a:t>
+            </a:r>
+            <a:r>
+              <a:rPr lang="en-US" sz="3600" dirty="0" spc="1" kern="0">
                 <a:solidFill>
                   <a:srgbClr val="14161C"/>
                 </a:solidFill>
@@ -8817,10 +8806,10 @@
                 <a:ea typeface="Bricolage Grotesque ExtraBold" pitchFamily="34" charset="-122"/>
                 <a:cs typeface="Bricolage Grotesque ExtraBold" pitchFamily="34" charset="-120"/>
               </a:rPr>
-              <a:t> gì</a:t>
-            </a:r>
-            <a:r>
-              <a:rPr lang="en-US" sz="3600" dirty="0" spc="-5" kern="0">
+              <a:t> khi</a:t>
+            </a:r>
+            <a:r>
+              <a:rPr lang="en-US" sz="3600" dirty="0" spc="7" kern="0">
                 <a:solidFill>
                   <a:srgbClr val="14161C"/>
                 </a:solidFill>
@@ -8828,10 +8817,10 @@
                 <a:ea typeface="Bricolage Grotesque ExtraBold" pitchFamily="34" charset="-122"/>
                 <a:cs typeface="Bricolage Grotesque ExtraBold" pitchFamily="34" charset="-120"/>
               </a:rPr>
-              <a:t> trong</a:t>
-            </a:r>
-            <a:r>
-              <a:rPr lang="en-US" sz="3600" dirty="0" spc="4" kern="0">
+              <a:t> đồng</a:t>
+            </a:r>
+            <a:r>
+              <a:rPr lang="en-US" sz="3600" dirty="0" spc="-5" kern="0">
                 <a:solidFill>
                   <a:srgbClr val="14161C"/>
                 </a:solidFill>
@@ -8839,10 +8828,10 @@
                 <a:ea typeface="Bricolage Grotesque ExtraBold" pitchFamily="34" charset="-122"/>
                 <a:cs typeface="Bricolage Grotesque ExtraBold" pitchFamily="34" charset="-120"/>
               </a:rPr>
-              <a:t> cấu</a:t>
-            </a:r>
-            <a:r>
-              <a:rPr lang="en-US" sz="3600" dirty="0" spc="-9" kern="0">
+              <a:t> ý,</a:t>
+            </a:r>
+            <a:r>
+              <a:rPr lang="en-US" sz="3600" dirty="0" spc="-41" kern="0">
                 <a:solidFill>
                   <a:srgbClr val="14161C"/>
                 </a:solidFill>
@@ -8850,10 +8839,10 @@
                 <a:ea typeface="Bricolage Grotesque ExtraBold" pitchFamily="34" charset="-122"/>
                 <a:cs typeface="Bricolage Grotesque ExtraBold" pitchFamily="34" charset="-120"/>
               </a:rPr>
-              <a:t> hình</a:t>
-            </a:r>
-            <a:r>
-              <a:rPr lang="en-US" sz="3600" dirty="0" spc="-36" kern="0">
+              <a:t> xem</a:t>
+            </a:r>
+            <a:r>
+              <a:rPr lang="en-US" sz="3600" dirty="0" spc="-14" kern="0">
                 <a:solidFill>
                   <a:srgbClr val="14161C"/>
                 </a:solidFill>
@@ -8861,10 +8850,10 @@
                 <a:ea typeface="Bricolage Grotesque ExtraBold" pitchFamily="34" charset="-122"/>
                 <a:cs typeface="Bricolage Grotesque ExtraBold" pitchFamily="34" charset="-120"/>
               </a:rPr>
-              <a:t> và</a:t>
-            </a:r>
-            <a:r>
-              <a:rPr lang="en-US" sz="3600" dirty="0" spc="-14" kern="0">
+              <a:t> gì</a:t>
+            </a:r>
+            <a:r>
+              <a:rPr lang="en-US" sz="3600" dirty="0" spc="2" kern="0">
                 <a:solidFill>
                   <a:srgbClr val="14161C"/>
                 </a:solidFill>
@@ -8872,10 +8861,10 @@
                 <a:ea typeface="Bricolage Grotesque ExtraBold" pitchFamily="34" charset="-122"/>
                 <a:cs typeface="Bricolage Grotesque ExtraBold" pitchFamily="34" charset="-120"/>
               </a:rPr>
-              <a:t> INFO</a:t>
-            </a:r>
-            <a:r>
-              <a:rPr lang="en-US" sz="3600" dirty="0" spc="-38" kern="0">
+              <a:t> ở</a:t>
+            </a:r>
+            <a:r>
+              <a:rPr lang="en-US" sz="3600" dirty="0" spc="5" kern="0">
                 <a:solidFill>
                   <a:srgbClr val="14161C"/>
                 </a:solidFill>
@@ -8883,10 +8872,10 @@
                 <a:ea typeface="Bricolage Grotesque ExtraBold" pitchFamily="34" charset="-122"/>
                 <a:cs typeface="Bricolage Grotesque ExtraBold" pitchFamily="34" charset="-120"/>
               </a:rPr>
-              <a:t> trước</a:t>
-            </a:r>
-            <a:r>
-              <a:rPr lang="en-US" sz="3600" dirty="0" spc="1" kern="0">
+              <a:t> cấu</a:t>
+            </a:r>
+            <a:r>
+              <a:rPr lang="en-US" sz="3600" dirty="0" spc="-9" kern="0">
                 <a:solidFill>
                   <a:srgbClr val="14161C"/>
                 </a:solidFill>
@@ -8894,10 +8883,10 @@
                 <a:ea typeface="Bricolage Grotesque ExtraBold" pitchFamily="34" charset="-122"/>
                 <a:cs typeface="Bricolage Grotesque ExtraBold" pitchFamily="34" charset="-120"/>
               </a:rPr>
-              <a:t> khi</a:t>
-            </a:r>
-            <a:r>
-              <a:rPr lang="en-US" sz="3600" dirty="0" spc="7" kern="0">
+              <a:t> hình</a:t>
+            </a:r>
+            <a:r>
+              <a:rPr lang="en-US" sz="3600" dirty="0" spc="-36" kern="0">
                 <a:solidFill>
                   <a:srgbClr val="14161C"/>
                 </a:solidFill>
@@ -8905,10 +8894,10 @@
                 <a:ea typeface="Bricolage Grotesque ExtraBold" pitchFamily="34" charset="-122"/>
                 <a:cs typeface="Bricolage Grotesque ExtraBold" pitchFamily="34" charset="-120"/>
               </a:rPr>
-              <a:t> đồng</a:t>
-            </a:r>
-            <a:r>
-              <a:rPr lang="en-US" sz="3600" dirty="0" spc="2" kern="0">
+              <a:t> và</a:t>
+            </a:r>
+            <a:r>
+              <a:rPr lang="en-US" sz="3600" dirty="0" spc="-18" kern="0">
                 <a:solidFill>
                   <a:srgbClr val="14161C"/>
                 </a:solidFill>
@@ -8916,7 +8905,7 @@
                 <a:ea typeface="Bricolage Grotesque ExtraBold" pitchFamily="34" charset="-122"/>
                 <a:cs typeface="Bricolage Grotesque ExtraBold" pitchFamily="34" charset="-120"/>
               </a:rPr>
-              <a:t> ý?</a:t>
+              <a:t> INFO?</a:t>
             </a:r>
             <a:endParaRPr lang="en-US" sz="3600" dirty="0"/>
           </a:p>

--- a/system-design-101/vi/lessons/sd-06-009/slides/sd-06-009.pptx
+++ b/system-design-101/vi/lessons/sd-06-009/slides/sd-06-009.pptx
@@ -4175,29 +4175,29 @@
               <a:t> tạm</a:t>
             </a:r>
             <a:r>
-              <a:rPr lang="en-US" sz="2700" dirty="0" spc="-1" kern="0">
-                <a:solidFill>
-                  <a:srgbClr val="E4E1D8"/>
-                </a:solidFill>
-                <a:latin typeface="Be Vietnam Pro" pitchFamily="34" charset="0"/>
-                <a:ea typeface="Be Vietnam Pro" pitchFamily="34" charset="-122"/>
-                <a:cs typeface="Be Vietnam Pro" pitchFamily="34" charset="-120"/>
-              </a:rPr>
-              <a:t> có thể</a:t>
-            </a:r>
-            <a:r>
-              <a:rPr lang="en-US" sz="2700" dirty="0" spc="-10" kern="0">
-                <a:solidFill>
-                  <a:srgbClr val="E4E1D8"/>
-                </a:solidFill>
-                <a:latin typeface="Be Vietnam Pro" pitchFamily="34" charset="0"/>
-                <a:ea typeface="Be Vietnam Pro" pitchFamily="34" charset="-122"/>
-                <a:cs typeface="Be Vietnam Pro" pitchFamily="34" charset="-120"/>
-              </a:rPr>
-              <a:t> mất;</a:t>
-            </a:r>
-            <a:r>
-              <a:rPr lang="en-US" sz="2700" dirty="0" spc="-3" kern="0">
+              <a:rPr lang="en-US" sz="2700" dirty="0" spc="-14" kern="0">
+                <a:solidFill>
+                  <a:srgbClr val="E4E1D8"/>
+                </a:solidFill>
+                <a:latin typeface="Be Vietnam Pro" pitchFamily="34" charset="0"/>
+                <a:ea typeface="Be Vietnam Pro" pitchFamily="34" charset="-122"/>
+                <a:cs typeface="Be Vietnam Pro" pitchFamily="34" charset="-120"/>
+              </a:rPr>
+              <a:t> mất</a:t>
+            </a:r>
+            <a:r>
+              <a:rPr lang="en-US" sz="2700" dirty="0" spc="9" kern="0">
+                <a:solidFill>
+                  <a:srgbClr val="E4E1D8"/>
+                </a:solidFill>
+                <a:latin typeface="Be Vietnam Pro" pitchFamily="34" charset="0"/>
+                <a:ea typeface="Be Vietnam Pro" pitchFamily="34" charset="-122"/>
+                <a:cs typeface="Be Vietnam Pro" pitchFamily="34" charset="-120"/>
+              </a:rPr>
+              <a:t> được;</a:t>
+            </a:r>
+            <a:r>
+              <a:rPr lang="en-US" sz="2700" dirty="0" spc="-4" kern="0">
                 <a:solidFill>
                   <a:srgbClr val="E4E1D8"/>
                 </a:solidFill>
@@ -8853,7 +8853,7 @@
               <a:t> gì</a:t>
             </a:r>
             <a:r>
-              <a:rPr lang="en-US" sz="3600" dirty="0" spc="2" kern="0">
+              <a:rPr lang="en-US" sz="3600" dirty="0" spc="-5" kern="0">
                 <a:solidFill>
                   <a:srgbClr val="14161C"/>
                 </a:solidFill>
@@ -8861,10 +8861,10 @@
                 <a:ea typeface="Bricolage Grotesque ExtraBold" pitchFamily="34" charset="-122"/>
                 <a:cs typeface="Bricolage Grotesque ExtraBold" pitchFamily="34" charset="-120"/>
               </a:rPr>
-              <a:t> ở</a:t>
-            </a:r>
-            <a:r>
-              <a:rPr lang="en-US" sz="3600" dirty="0" spc="5" kern="0">
+              <a:t> trong</a:t>
+            </a:r>
+            <a:r>
+              <a:rPr lang="en-US" sz="3600" dirty="0" spc="4" kern="0">
                 <a:solidFill>
                   <a:srgbClr val="14161C"/>
                 </a:solidFill>
@@ -8875,7 +8875,7 @@
               <a:t> cấu</a:t>
             </a:r>
             <a:r>
-              <a:rPr lang="en-US" sz="3600" dirty="0" spc="-9" kern="0">
+              <a:rPr lang="en-US" sz="3600" dirty="0" spc="-8" kern="0">
                 <a:solidFill>
                   <a:srgbClr val="14161C"/>
                 </a:solidFill>
@@ -8883,18 +8883,7 @@
                 <a:ea typeface="Bricolage Grotesque ExtraBold" pitchFamily="34" charset="-122"/>
                 <a:cs typeface="Bricolage Grotesque ExtraBold" pitchFamily="34" charset="-120"/>
               </a:rPr>
-              <a:t> hình</a:t>
-            </a:r>
-            <a:r>
-              <a:rPr lang="en-US" sz="3600" dirty="0" spc="-36" kern="0">
-                <a:solidFill>
-                  <a:srgbClr val="14161C"/>
-                </a:solidFill>
-                <a:latin typeface="Bricolage Grotesque ExtraBold" pitchFamily="34" charset="0"/>
-                <a:ea typeface="Bricolage Grotesque ExtraBold" pitchFamily="34" charset="-122"/>
-                <a:cs typeface="Bricolage Grotesque ExtraBold" pitchFamily="34" charset="-120"/>
-              </a:rPr>
-              <a:t> và</a:t>
+              <a:t> hình,</a:t>
             </a:r>
             <a:r>
               <a:rPr lang="en-US" sz="3600" dirty="0" spc="-18" kern="0">
